--- a/assets/powerpoints/module-n1-classe/C2-lundi-mardi-mercredi.pptx
+++ b/assets/powerpoints/module-n1-classe/C2-lundi-mardi-mercredi.pptx
@@ -9033,7 +9033,25 @@
                 </a:solidFill>
                 <a:latin typeface="Verdana"/>
               </a:rPr>
-              <a:t>Elle ne veut pas dire que le centre est fermé. Le secrétariat répond, on peut venir chercher un papier. C'est le &lt;b&gt;groupe&lt;/b&gt; qui ne se réunit pas.</a:t>
+              <a:t>Elle ne veut pas dire que le centre est fermé. Le secrétariat répond, on peut venir chercher un papier. C'est le </a:t>
+            </a:r>
+            <a:r>
+              <a:rPr sz="2000" b="1" i="0">
+                <a:solidFill>
+                  <a:srgbClr val="4B4F52"/>
+                </a:solidFill>
+                <a:latin typeface="Verdana"/>
+              </a:rPr>
+              <a:t>groupe</a:t>
+            </a:r>
+            <a:r>
+              <a:rPr sz="2000" b="0" i="0">
+                <a:solidFill>
+                  <a:srgbClr val="4B4F52"/>
+                </a:solidFill>
+                <a:latin typeface="Verdana"/>
+              </a:rPr>
+              <a:t> qui ne se réunit pas.</a:t>
             </a:r>
           </a:p>
         </p:txBody>
